--- a/livro_ia_educacao/saida/pptx/Cap15_slides.pptx
+++ b/livro_ia_educacao/saida/pptx/Cap15_slides.pptx
@@ -9503,11 +9503,11 @@
         <p:spPr>
           <a:xfrm>
             <a:off x="548640" y="1417320"/>
-            <a:ext cx="11064240" cy="762000"/>
+            <a:ext cx="11064240" cy="682752"/>
           </a:xfrm>
           <a:prstGeom prst="roundRect">
             <a:avLst>
-              <a:gd name="adj" fmla="val 14400"/>
+              <a:gd name="adj" fmla="val 16071"/>
             </a:avLst>
           </a:prstGeom>
           <a:solidFill>
@@ -9534,7 +9534,7 @@
         <p:spPr>
           <a:xfrm>
             <a:off x="731520" y="1417320"/>
-            <a:ext cx="548640" cy="762000"/>
+            <a:ext cx="548640" cy="682752"/>
           </a:xfrm>
           <a:prstGeom prst="rect">
             <a:avLst/>
@@ -9570,7 +9570,7 @@
         <p:spPr>
           <a:xfrm>
             <a:off x="1463040" y="1417320"/>
-            <a:ext cx="9966960" cy="762000"/>
+            <a:ext cx="9966960" cy="682752"/>
           </a:xfrm>
           <a:prstGeom prst="rect">
             <a:avLst/>
@@ -9605,12 +9605,12 @@
         </p:nvSpPr>
         <p:spPr>
           <a:xfrm>
-            <a:off x="548640" y="2289048"/>
-            <a:ext cx="11064240" cy="762000"/>
+            <a:off x="548640" y="2209800"/>
+            <a:ext cx="11064240" cy="682752"/>
           </a:xfrm>
           <a:prstGeom prst="roundRect">
             <a:avLst>
-              <a:gd name="adj" fmla="val 14400"/>
+              <a:gd name="adj" fmla="val 16071"/>
             </a:avLst>
           </a:prstGeom>
           <a:solidFill>
@@ -9636,8 +9636,8 @@
         </p:nvSpPr>
         <p:spPr>
           <a:xfrm>
-            <a:off x="731520" y="2289048"/>
-            <a:ext cx="548640" cy="762000"/>
+            <a:off x="731520" y="2209800"/>
+            <a:ext cx="548640" cy="682752"/>
           </a:xfrm>
           <a:prstGeom prst="rect">
             <a:avLst/>
@@ -9672,8 +9672,8 @@
         </p:nvSpPr>
         <p:spPr>
           <a:xfrm>
-            <a:off x="1463040" y="2289048"/>
-            <a:ext cx="9966960" cy="762000"/>
+            <a:off x="1463040" y="2209800"/>
+            <a:ext cx="9966960" cy="682752"/>
           </a:xfrm>
           <a:prstGeom prst="rect">
             <a:avLst/>
@@ -9708,12 +9708,12 @@
         </p:nvSpPr>
         <p:spPr>
           <a:xfrm>
-            <a:off x="548640" y="3160776"/>
-            <a:ext cx="11064240" cy="762000"/>
+            <a:off x="548640" y="3002280"/>
+            <a:ext cx="11064240" cy="682752"/>
           </a:xfrm>
           <a:prstGeom prst="roundRect">
             <a:avLst>
-              <a:gd name="adj" fmla="val 14400"/>
+              <a:gd name="adj" fmla="val 16071"/>
             </a:avLst>
           </a:prstGeom>
           <a:solidFill>
@@ -9739,8 +9739,8 @@
         </p:nvSpPr>
         <p:spPr>
           <a:xfrm>
-            <a:off x="731520" y="3160776"/>
-            <a:ext cx="548640" cy="762000"/>
+            <a:off x="731520" y="3002280"/>
+            <a:ext cx="548640" cy="682752"/>
           </a:xfrm>
           <a:prstGeom prst="rect">
             <a:avLst/>
@@ -9775,8 +9775,8 @@
         </p:nvSpPr>
         <p:spPr>
           <a:xfrm>
-            <a:off x="1463040" y="3160776"/>
-            <a:ext cx="9966960" cy="762000"/>
+            <a:off x="1463040" y="3002280"/>
+            <a:ext cx="9966960" cy="682752"/>
           </a:xfrm>
           <a:prstGeom prst="rect">
             <a:avLst/>
@@ -9811,12 +9811,12 @@
         </p:nvSpPr>
         <p:spPr>
           <a:xfrm>
-            <a:off x="548640" y="4032504"/>
-            <a:ext cx="11064240" cy="762000"/>
+            <a:off x="548640" y="3794760"/>
+            <a:ext cx="11064240" cy="682752"/>
           </a:xfrm>
           <a:prstGeom prst="roundRect">
             <a:avLst>
-              <a:gd name="adj" fmla="val 14400"/>
+              <a:gd name="adj" fmla="val 16071"/>
             </a:avLst>
           </a:prstGeom>
           <a:solidFill>
@@ -9842,8 +9842,8 @@
         </p:nvSpPr>
         <p:spPr>
           <a:xfrm>
-            <a:off x="731520" y="4032504"/>
-            <a:ext cx="548640" cy="762000"/>
+            <a:off x="731520" y="3794760"/>
+            <a:ext cx="548640" cy="682752"/>
           </a:xfrm>
           <a:prstGeom prst="rect">
             <a:avLst/>
@@ -9878,8 +9878,8 @@
         </p:nvSpPr>
         <p:spPr>
           <a:xfrm>
-            <a:off x="1463040" y="4032504"/>
-            <a:ext cx="9966960" cy="762000"/>
+            <a:off x="1463040" y="3794760"/>
+            <a:ext cx="9966960" cy="682752"/>
           </a:xfrm>
           <a:prstGeom prst="rect">
             <a:avLst/>
@@ -9914,12 +9914,12 @@
         </p:nvSpPr>
         <p:spPr>
           <a:xfrm>
-            <a:off x="548640" y="4904232"/>
-            <a:ext cx="11064240" cy="762000"/>
+            <a:off x="548640" y="4587240"/>
+            <a:ext cx="11064240" cy="682752"/>
           </a:xfrm>
           <a:prstGeom prst="roundRect">
             <a:avLst>
-              <a:gd name="adj" fmla="val 14400"/>
+              <a:gd name="adj" fmla="val 16071"/>
             </a:avLst>
           </a:prstGeom>
           <a:solidFill>
@@ -9945,8 +9945,8 @@
         </p:nvSpPr>
         <p:spPr>
           <a:xfrm>
-            <a:off x="731520" y="4904232"/>
-            <a:ext cx="548640" cy="762000"/>
+            <a:off x="731520" y="4587240"/>
+            <a:ext cx="548640" cy="682752"/>
           </a:xfrm>
           <a:prstGeom prst="rect">
             <a:avLst/>
@@ -9981,8 +9981,8 @@
         </p:nvSpPr>
         <p:spPr>
           <a:xfrm>
-            <a:off x="1463040" y="4904232"/>
-            <a:ext cx="9966960" cy="762000"/>
+            <a:off x="1463040" y="4587240"/>
+            <a:ext cx="9966960" cy="682752"/>
           </a:xfrm>
           <a:prstGeom prst="rect">
             <a:avLst/>
@@ -10017,12 +10017,12 @@
         </p:nvSpPr>
         <p:spPr>
           <a:xfrm>
-            <a:off x="548640" y="5775960"/>
-            <a:ext cx="11064240" cy="762000"/>
+            <a:off x="548640" y="5379720"/>
+            <a:ext cx="11064240" cy="682752"/>
           </a:xfrm>
           <a:prstGeom prst="roundRect">
             <a:avLst>
-              <a:gd name="adj" fmla="val 14400"/>
+              <a:gd name="adj" fmla="val 16071"/>
             </a:avLst>
           </a:prstGeom>
           <a:solidFill>
@@ -10048,8 +10048,8 @@
         </p:nvSpPr>
         <p:spPr>
           <a:xfrm>
-            <a:off x="731520" y="5775960"/>
-            <a:ext cx="548640" cy="762000"/>
+            <a:off x="731520" y="5379720"/>
+            <a:ext cx="548640" cy="682752"/>
           </a:xfrm>
           <a:prstGeom prst="rect">
             <a:avLst/>
@@ -10084,8 +10084,8 @@
         </p:nvSpPr>
         <p:spPr>
           <a:xfrm>
-            <a:off x="1463040" y="5775960"/>
-            <a:ext cx="9966960" cy="762000"/>
+            <a:off x="1463040" y="5379720"/>
+            <a:ext cx="9966960" cy="682752"/>
           </a:xfrm>
           <a:prstGeom prst="rect">
             <a:avLst/>
